--- a/presentation/pcos_pathfinder_deck.pptx
+++ b/presentation/pcos_pathfinder_deck.pptx
@@ -26817,8 +26817,8 @@
         </p:blipFill>
         <p:spPr>
           <a:xfrm>
-            <a:off x="502920" y="1922446"/>
-            <a:ext cx="7498079" cy="4430427"/>
+            <a:off x="802902" y="1920240"/>
+            <a:ext cx="6898114" cy="4434840"/>
           </a:xfrm>
           <a:prstGeom prst="rect">
             <a:avLst/>
@@ -27412,8 +27412,8 @@
         </p:blipFill>
         <p:spPr>
           <a:xfrm>
-            <a:off x="502920" y="2366284"/>
-            <a:ext cx="7498078" cy="3542752"/>
+            <a:off x="502920" y="2008968"/>
+            <a:ext cx="7498079" cy="4257383"/>
           </a:xfrm>
           <a:prstGeom prst="rect">
             <a:avLst/>
@@ -28007,8 +28007,8 @@
         </p:blipFill>
         <p:spPr>
           <a:xfrm>
-            <a:off x="922154" y="1920240"/>
-            <a:ext cx="6659610" cy="4434840"/>
+            <a:off x="879808" y="1920240"/>
+            <a:ext cx="6744303" cy="4434840"/>
           </a:xfrm>
           <a:prstGeom prst="rect">
             <a:avLst/>
@@ -28602,8 +28602,8 @@
         </p:blipFill>
         <p:spPr>
           <a:xfrm>
-            <a:off x="502920" y="1984843"/>
-            <a:ext cx="7498078" cy="4305633"/>
+            <a:off x="653882" y="1920240"/>
+            <a:ext cx="7196155" cy="4434840"/>
           </a:xfrm>
           <a:prstGeom prst="rect">
             <a:avLst/>
@@ -29197,8 +29197,8 @@
         </p:blipFill>
         <p:spPr>
           <a:xfrm>
-            <a:off x="666131" y="1920240"/>
-            <a:ext cx="7171656" cy="4434840"/>
+            <a:off x="601584" y="1920240"/>
+            <a:ext cx="7300750" cy="4434840"/>
           </a:xfrm>
           <a:prstGeom prst="rect">
             <a:avLst/>
